--- a/presentation/AgentPulse.pptx
+++ b/presentation/AgentPulse.pptx
@@ -6821,7 +6821,7 @@
                 <a:ea typeface="Cambria" pitchFamily="34" charset="-122"/>
                 <a:cs typeface="Cambria" pitchFamily="34" charset="-120"/>
               </a:rPr>
-              <a:t>27.8 ms</a:t>
+              <a:t>19.1 ms</a:t>
             </a:r>
             <a:endParaRPr lang="en-US" sz="3000" dirty="0"/>
           </a:p>
@@ -6965,7 +6965,7 @@
                 <a:ea typeface="Cambria" pitchFamily="34" charset="-122"/>
                 <a:cs typeface="Cambria" pitchFamily="34" charset="-120"/>
               </a:rPr>
-              <a:t>215.9 ms</a:t>
+              <a:t>151.19 ms</a:t>
             </a:r>
             <a:endParaRPr lang="en-US" sz="3000" dirty="0"/>
           </a:p>

--- a/presentation/AgentPulse.pptx
+++ b/presentation/AgentPulse.pptx
@@ -226,7 +226,7 @@
             <c:bubble3D val="0"/>
             <c:spPr>
               <a:solidFill>
-                <a:srgbClr val="22D3EE"/>
+                <a:srgbClr val="FBBF24"/>
               </a:solidFill>
               <a:effectLst/>
             </c:spPr>
@@ -275,7 +275,7 @@
                   <c:v>0.619</c:v>
                 </c:pt>
                 <c:pt idx="4">
-                  <c:v>0.963</c:v>
+                  <c:v>0.897</c:v>
                 </c:pt>
               </c:numCache>
             </c:numRef>
@@ -1427,7 +1427,7 @@
           <a:p>
             <a:r>
               <a:rPr lang="en-US" dirty="0"/>
-              <a:t>Point out two things on the chart. The cascade matches DeBERTa alone at 0.963 while being cheaper on the common case, which is the whole justification for a gate. And config F is deliberately shown: adding the old drift signal made the classifier worse, 0.619, and that result was published rather than dropped.</a:t>
+              <a:t>Point out three things on the chart. The cascade matches DeBERTa alone at 0.963; MiniLM adds about 19 ms and no F1, and both run on every span. G, the full pipeline, is 0.897 on corrected NLI labels at the 0.5 weight it ran with, not re-run at the shipped 0.3. And config F is deliberately shown: adding the old drift signal made the classifier worse, 0.619, and that result was published rather than dropped.</a:t>
             </a:r>
             <a:endParaRPr lang="en-US" dirty="0"/>
           </a:p>
@@ -3252,7 +3252,7 @@
                 <a:ea typeface="Cambria" pitchFamily="34" charset="-122"/>
                 <a:cs typeface="Cambria" pitchFamily="34" charset="-120"/>
               </a:rPr>
-              <a:t>209 / 209</a:t>
+              <a:t>422 / 136</a:t>
             </a:r>
             <a:endParaRPr lang="en-US" sz="2800" dirty="0"/>
           </a:p>
@@ -3291,7 +3291,7 @@
                 <a:ea typeface="Calibri" pitchFamily="34" charset="-122"/>
                 <a:cs typeface="Calibri" pitchFamily="34" charset="-120"/>
               </a:rPr>
-              <a:t>Backend tests passing</a:t>
+              <a:t>Backend / dashboard tests passing</a:t>
             </a:r>
             <a:endParaRPr lang="en-US" sz="1200" dirty="0"/>
           </a:p>
@@ -3330,7 +3330,7 @@
                 <a:ea typeface="Cambria" pitchFamily="34" charset="-122"/>
                 <a:cs typeface="Cambria" pitchFamily="34" charset="-120"/>
               </a:rPr>
-              <a:t>20,700+</a:t>
+              <a:t>117</a:t>
             </a:r>
             <a:endParaRPr lang="en-US" sz="2800" dirty="0"/>
           </a:p>
@@ -3369,7 +3369,7 @@
                 <a:ea typeface="Calibri" pitchFamily="34" charset="-122"/>
                 <a:cs typeface="Calibri" pitchFamily="34" charset="-120"/>
               </a:rPr>
-              <a:t>Spans ingested and stored</a:t>
+              <a:t>Evaluations on the live site, 22 Oct</a:t>
             </a:r>
             <a:endParaRPr lang="en-US" sz="1200" dirty="0"/>
           </a:p>
@@ -6677,7 +6677,7 @@
                 <a:ea typeface="Cambria" pitchFamily="34" charset="-122"/>
                 <a:cs typeface="Cambria" pitchFamily="34" charset="-120"/>
               </a:rPr>
-              <a:t>A cheap gate in front of an expensive judge</a:t>
+              <a:t>Two small models on every span, no LLM judge</a:t>
             </a:r>
             <a:endParaRPr lang="en-US" sz="3400" dirty="0"/>
           </a:p>
@@ -6926,7 +6926,7 @@
                 <a:ea typeface="Calibri" pitchFamily="34" charset="-122"/>
                 <a:cs typeface="Calibri" pitchFamily="34" charset="-120"/>
               </a:rPr>
-              <a:t>Cross-encoder entailment, run only when the fast gate is not confident. Catches the subtle contradictions.</a:t>
+              <a:t>Cross-encoder NLI on every span. Risk = contradiction + 0.3 x neutral; high above 0.7.</a:t>
             </a:r>
             <a:endParaRPr lang="en-US" sz="1250" dirty="0"/>
           </a:p>
@@ -7342,7 +7342,7 @@
                 <a:ea typeface="Calibri" pitchFamily="34" charset="-122"/>
                 <a:cs typeface="Calibri" pitchFamily="34" charset="-120"/>
               </a:rPr>
-              <a:t>NLI cascade over retrieved premises. F1 0.963 on the held-out split.</a:t>
+              <a:t>NLI over the evidence. F1 0.963 on the 30-case test split (5 cases copy dev).</a:t>
             </a:r>
             <a:endParaRPr lang="en-US" sz="1250" dirty="0"/>
           </a:p>
